--- a/Fabricaation.pptx
+++ b/Fabricaation.pptx
@@ -437,7 +437,7 @@
           <a:p>
             <a:r>
               <a:rPr lang="en-US" dirty="0"/>
-              <a:t>The main idea is that the user wears a device with an IMU for motion detection and a heart-rate sensor. The wearable sends information via Bluetooth to a receiver on our TurtleBot. There are no wires connecting the user to the robot.</a:t>
+              <a:t>The main idea is that the user wears a device with an movement for motion detection and a heart-rate sensor. The wearable sends information via Bluetooth to a receiver on our TurtleBot. There are no wires connecting the user to the robot.</a:t>
             </a:r>
           </a:p>
           <a:p>
@@ -629,7 +629,7 @@
           <a:p>
             <a:r>
               <a:rPr lang="en-US" dirty="0"/>
-              <a:t>Our initial proof of concept will focus on one exercise. We’ll use the TurtleBot 3 Burger, a wearable IMU and heart-rate sensor, Bluetooth, ROS 2, simple adaptation and voice feedback.</a:t>
+              <a:t>Our initial proof of concept will focus on one exercise. We’ll use the TurtleBot 3 Burger, a wearable movement and heart-rate sensor, Bluetooth, ROS 2, simple adaptation and voice feedback.</a:t>
             </a:r>
           </a:p>
           <a:p>
@@ -1370,14 +1370,20 @@
           <a:p>
             <a:pPr algn="ctr"/>
             <a:r>
-              <a:rPr sz="2100" b="1" dirty="0">
-                <a:solidFill>
-                  <a:srgbClr val="12334A"/>
-                </a:solidFill>
-                <a:latin typeface="DejaVu Sans"/>
-              </a:rPr>
-              <a:t>IMU + heart-rate sensor</a:t>
-            </a:r>
+              <a:rPr lang="en-US" sz="2100" b="1" dirty="0">
+                <a:solidFill>
+                  <a:srgbClr val="12334A"/>
+                </a:solidFill>
+                <a:latin typeface="DejaVu Sans"/>
+              </a:rPr>
+              <a:t>movement + heart-rate sensor</a:t>
+            </a:r>
+            <a:endParaRPr sz="2100" b="1" dirty="0">
+              <a:solidFill>
+                <a:srgbClr val="12334A"/>
+              </a:solidFill>
+              <a:latin typeface="DejaVu Sans"/>
+            </a:endParaRPr>
           </a:p>
         </p:txBody>
       </p:sp>
@@ -2263,7 +2269,7 @@
         </p:nvSpPr>
         <p:spPr>
           <a:xfrm>
-            <a:off x="609600" y="2076449"/>
+            <a:off x="890587" y="2257421"/>
             <a:ext cx="3752850" cy="3705225"/>
           </a:xfrm>
           <a:prstGeom prst="rect">
@@ -2337,7 +2343,7 @@
         </p:nvSpPr>
         <p:spPr>
           <a:xfrm>
-            <a:off x="809625" y="2228850"/>
+            <a:off x="1000124" y="2259460"/>
             <a:ext cx="3362325" cy="304800"/>
           </a:xfrm>
           <a:prstGeom prst="rect">
@@ -2451,8 +2457,8 @@
         </p:nvSpPr>
         <p:spPr>
           <a:xfrm>
-            <a:off x="800100" y="2838450"/>
-            <a:ext cx="1600200" cy="704850"/>
+            <a:off x="890587" y="3019422"/>
+            <a:ext cx="1790700" cy="704850"/>
           </a:xfrm>
           <a:prstGeom prst="rect">
             <a:avLst/>
@@ -2483,16 +2489,35 @@
               </a:defRPr>
             </a:pPr>
             <a:r>
-              <a:rPr sz="1875" b="1" dirty="0">
-                <a:solidFill>
-                  <a:srgbClr val="12334A"/>
-                </a:solidFill>
-                <a:latin typeface="DejaVu Sans"/>
-                <a:ea typeface="DejaVu Sans"/>
-                <a:cs typeface="DejaVu Sans"/>
-              </a:rPr>
-              <a:t>IMU</a:t>
-            </a:r>
+              <a:rPr lang="en-US" sz="1875" b="1" dirty="0">
+                <a:solidFill>
+                  <a:srgbClr val="12334A"/>
+                </a:solidFill>
+                <a:latin typeface="DejaVu Sans"/>
+                <a:ea typeface="DejaVu Sans"/>
+                <a:cs typeface="DejaVu Sans"/>
+              </a:rPr>
+              <a:t>Movement </a:t>
+            </a:r>
+            <a:r>
+              <a:rPr lang="en-US" sz="2000" b="1" dirty="0">
+                <a:solidFill>
+                  <a:srgbClr val="12334A"/>
+                </a:solidFill>
+                <a:latin typeface="DejaVu Sans"/>
+                <a:ea typeface="DejaVu Sans"/>
+                <a:cs typeface="DejaVu Sans"/>
+              </a:rPr>
+              <a:t>sensor</a:t>
+            </a:r>
+            <a:endParaRPr sz="1875" b="1" dirty="0">
+              <a:solidFill>
+                <a:srgbClr val="12334A"/>
+              </a:solidFill>
+              <a:latin typeface="DejaVu Sans"/>
+              <a:ea typeface="DejaVu Sans"/>
+              <a:cs typeface="DejaVu Sans"/>
+            </a:endParaRPr>
           </a:p>
         </p:txBody>
       </p:sp>
@@ -2512,8 +2537,8 @@
         </p:nvSpPr>
         <p:spPr>
           <a:xfrm>
-            <a:off x="800100" y="3876675"/>
-            <a:ext cx="1600200" cy="800100"/>
+            <a:off x="890587" y="4057647"/>
+            <a:ext cx="1790700" cy="800100"/>
           </a:xfrm>
           <a:prstGeom prst="rect">
             <a:avLst/>
@@ -2604,7 +2629,7 @@
         </p:nvSpPr>
         <p:spPr>
           <a:xfrm>
-            <a:off x="2647950" y="3286125"/>
+            <a:off x="2928937" y="3467097"/>
             <a:ext cx="1495425" cy="971550"/>
           </a:xfrm>
           <a:prstGeom prst="rect">
@@ -2676,6 +2701,7 @@
         <p:nvCxnSpPr>
           <p:cNvPr id="11" name="Elbow Connector 10"/>
           <p:cNvCxnSpPr>
+            <a:cxnSpLocks/>
             <a:stCxn id="8" idx="3"/>
             <a:endCxn id="10" idx="1"/>
           </p:cNvCxnSpPr>
@@ -2683,7 +2709,7 @@
         </p:nvCxnSpPr>
         <p:spPr>
           <a:xfrm>
-            <a:off x="2400300" y="3190875"/>
+            <a:off x="2681287" y="3371847"/>
             <a:ext cx="247650" cy="581025"/>
           </a:xfrm>
           <a:prstGeom prst="bentConnector3">
@@ -2711,7 +2737,7 @@
         </p:nvCxnSpPr>
         <p:spPr>
           <a:xfrm flipV="1">
-            <a:off x="2400300" y="3771900"/>
+            <a:off x="2681287" y="3952872"/>
             <a:ext cx="247650" cy="504825"/>
           </a:xfrm>
           <a:prstGeom prst="bentConnector3">
@@ -2743,7 +2769,7 @@
         </p:nvSpPr>
         <p:spPr>
           <a:xfrm>
-            <a:off x="5953125" y="3286125"/>
+            <a:off x="5953125" y="3467097"/>
             <a:ext cx="1514475" cy="971550"/>
           </a:xfrm>
           <a:prstGeom prst="rect">
@@ -2822,8 +2848,8 @@
         </p:nvCxnSpPr>
         <p:spPr>
           <a:xfrm>
-            <a:off x="4143375" y="3771900"/>
-            <a:ext cx="1809750" cy="0"/>
+            <a:off x="4424362" y="3952872"/>
+            <a:ext cx="1528763" cy="0"/>
           </a:xfrm>
           <a:prstGeom prst="straightConnector1">
             <a:avLst/>
@@ -2909,7 +2935,7 @@
         </p:nvSpPr>
         <p:spPr>
           <a:xfrm>
-            <a:off x="7858125" y="3286125"/>
+            <a:off x="7858125" y="3467097"/>
             <a:ext cx="1495425" cy="971550"/>
           </a:xfrm>
           <a:prstGeom prst="rect">
@@ -2993,7 +3019,7 @@
         </p:nvSpPr>
         <p:spPr>
           <a:xfrm>
-            <a:off x="9772650" y="3286125"/>
+            <a:off x="9772650" y="3467097"/>
             <a:ext cx="1571625" cy="971550"/>
           </a:xfrm>
           <a:prstGeom prst="rect">
@@ -3072,7 +3098,7 @@
         </p:nvCxnSpPr>
         <p:spPr>
           <a:xfrm>
-            <a:off x="7467600" y="3771900"/>
+            <a:off x="7467600" y="3952872"/>
             <a:ext cx="390525" cy="0"/>
           </a:xfrm>
           <a:prstGeom prst="straightConnector1">
@@ -3097,7 +3123,7 @@
         </p:nvCxnSpPr>
         <p:spPr>
           <a:xfrm>
-            <a:off x="9353550" y="3771900"/>
+            <a:off x="9353550" y="3952872"/>
             <a:ext cx="419100" cy="0"/>
           </a:xfrm>
           <a:prstGeom prst="straightConnector1">
@@ -3240,8 +3266,8 @@
         </p:nvCxnSpPr>
         <p:spPr>
           <a:xfrm rot="5400000">
-            <a:off x="8646321" y="4355305"/>
-            <a:ext cx="2009772" cy="1814512"/>
+            <a:off x="8736807" y="4445791"/>
+            <a:ext cx="1828800" cy="1814512"/>
           </a:xfrm>
           <a:prstGeom prst="bentConnector2">
             <a:avLst/>
@@ -3307,120 +3333,6 @@
                 <a:cs typeface="DejaVu Sans"/>
               </a:rPr>
               <a:t>The wearable measures. The robot guides.</a:t>
-            </a:r>
-          </a:p>
-        </p:txBody>
-      </p:sp>
-      <p:sp>
-        <p:nvSpPr>
-          <p:cNvPr id="65" name="Rectangle 14">
-            <a:extLst>
-              <a:ext uri="{FF2B5EF4-FFF2-40B4-BE49-F238E27FC236}">
-                <a16:creationId xmlns:a16="http://schemas.microsoft.com/office/drawing/2014/main" id="{00000003-000B-4000-8000-000000000000}"/>
-              </a:ext>
-            </a:extLst>
-          </p:cNvPr>
-          <p:cNvSpPr>
-            <a:spLocks noGrp="1"/>
-          </p:cNvSpPr>
-          <p:nvPr/>
-        </p:nvSpPr>
-        <p:spPr>
-          <a:xfrm>
-            <a:off x="800100" y="4895850"/>
-            <a:ext cx="3448050" cy="314325"/>
-          </a:xfrm>
-          <a:prstGeom prst="rect">
-            <a:avLst/>
-          </a:prstGeom>
-          <a:noFill/>
-          <a:ln w="0">
-            <a:noFill/>
-          </a:ln>
-        </p:spPr>
-        <p:txBody>
-          <a:bodyPr wrap="square" lIns="0" tIns="0" rIns="0" bIns="0" anchor="ctr">
-            <a:noAutofit/>
-          </a:bodyPr>
-          <a:lstStyle/>
-          <a:p>
-            <a:pPr algn="l">
-              <a:defRPr sz="1800" b="0">
-                <a:solidFill>
-                  <a:srgbClr val="12334A"/>
-                </a:solidFill>
-                <a:latin typeface="DejaVu Sans"/>
-                <a:ea typeface="DejaVu Sans"/>
-                <a:cs typeface="DejaVu Sans"/>
-              </a:defRPr>
-            </a:pPr>
-            <a:r>
-              <a:rPr sz="1450" b="0">
-                <a:solidFill>
-                  <a:srgbClr val="12334A"/>
-                </a:solidFill>
-                <a:latin typeface="DejaVu Sans"/>
-                <a:ea typeface="DejaVu Sans"/>
-                <a:cs typeface="DejaVu Sans"/>
-              </a:rPr>
-              <a:t>IMU: movement and repetitions</a:t>
-            </a:r>
-          </a:p>
-        </p:txBody>
-      </p:sp>
-      <p:sp>
-        <p:nvSpPr>
-          <p:cNvPr id="67" name="Rectangle 16">
-            <a:extLst>
-              <a:ext uri="{FF2B5EF4-FFF2-40B4-BE49-F238E27FC236}">
-                <a16:creationId xmlns:a16="http://schemas.microsoft.com/office/drawing/2014/main" id="{00000003-000D-4000-8000-000000000000}"/>
-              </a:ext>
-            </a:extLst>
-          </p:cNvPr>
-          <p:cNvSpPr>
-            <a:spLocks noGrp="1"/>
-          </p:cNvSpPr>
-          <p:nvPr/>
-        </p:nvSpPr>
-        <p:spPr>
-          <a:xfrm>
-            <a:off x="800100" y="5248275"/>
-            <a:ext cx="3448050" cy="314325"/>
-          </a:xfrm>
-          <a:prstGeom prst="rect">
-            <a:avLst/>
-          </a:prstGeom>
-          <a:noFill/>
-          <a:ln w="0">
-            <a:noFill/>
-          </a:ln>
-        </p:spPr>
-        <p:txBody>
-          <a:bodyPr wrap="square" lIns="0" tIns="0" rIns="0" bIns="0" anchor="ctr">
-            <a:noAutofit/>
-          </a:bodyPr>
-          <a:lstStyle/>
-          <a:p>
-            <a:pPr algn="l">
-              <a:defRPr sz="1800" b="0">
-                <a:solidFill>
-                  <a:srgbClr val="12334A"/>
-                </a:solidFill>
-                <a:latin typeface="DejaVu Sans"/>
-                <a:ea typeface="DejaVu Sans"/>
-                <a:cs typeface="DejaVu Sans"/>
-              </a:defRPr>
-            </a:pPr>
-            <a:r>
-              <a:rPr sz="1450" b="0">
-                <a:solidFill>
-                  <a:srgbClr val="12334A"/>
-                </a:solidFill>
-                <a:latin typeface="DejaVu Sans"/>
-                <a:ea typeface="DejaVu Sans"/>
-                <a:cs typeface="DejaVu Sans"/>
-              </a:rPr>
-              <a:t>Heart rate: physiological effort signal</a:t>
             </a:r>
           </a:p>
         </p:txBody>
@@ -4088,15 +4000,15 @@
               </a:defRPr>
             </a:pPr>
             <a:r>
-              <a:rPr lang="en-US" sz="1620" b="0">
-                <a:solidFill>
-                  <a:srgbClr val="12334A"/>
-                </a:solidFill>
-                <a:latin typeface="DejaVu Sans"/>
-                <a:ea typeface="DejaVu Sans"/>
-                <a:cs typeface="DejaVu Sans"/>
-              </a:rPr>
-              <a:t>IMU tracks motion and repetitions</a:t>
+              <a:rPr lang="en-US" sz="1620" b="0" dirty="0">
+                <a:solidFill>
+                  <a:srgbClr val="12334A"/>
+                </a:solidFill>
+                <a:latin typeface="DejaVu Sans"/>
+                <a:ea typeface="DejaVu Sans"/>
+                <a:cs typeface="DejaVu Sans"/>
+              </a:rPr>
+              <a:t>Movement sensor tracks motion and repetitions</a:t>
             </a:r>
           </a:p>
         </p:txBody>
@@ -4202,7 +4114,7 @@
               </a:defRPr>
             </a:pPr>
             <a:r>
-              <a:rPr lang="en-US" sz="1620" b="0">
+              <a:rPr lang="en-US" sz="1620" b="0" dirty="0">
                 <a:solidFill>
                   <a:srgbClr val="12334A"/>
                 </a:solidFill>
@@ -4316,7 +4228,7 @@
               </a:defRPr>
             </a:pPr>
             <a:r>
-              <a:rPr lang="en-US" sz="1620" b="0">
+              <a:rPr lang="en-US" sz="1620" b="0" dirty="0">
                 <a:solidFill>
                   <a:srgbClr val="12334A"/>
                 </a:solidFill>
@@ -4745,8 +4657,8 @@
         </p:nvSpPr>
         <p:spPr>
           <a:xfrm>
-            <a:off x="609600" y="2819400"/>
-            <a:ext cx="4095750" cy="2181225"/>
+            <a:off x="619125" y="3093131"/>
+            <a:ext cx="4362449" cy="1500411"/>
           </a:xfrm>
           <a:prstGeom prst="rect">
             <a:avLst/>
@@ -4761,7 +4673,7 @@
           <a:p>
             <a:pPr algn="l"/>
             <a:r>
-              <a:rPr sz="1950" b="0">
+              <a:rPr sz="1950" b="0" dirty="0">
                 <a:solidFill>
                   <a:srgbClr val="12334A"/>
                 </a:solidFill>
@@ -4773,19 +4685,37 @@
           <a:p>
             <a:pPr algn="l"/>
             <a:r>
-              <a:rPr sz="1950" b="0">
-                <a:solidFill>
-                  <a:srgbClr val="12334A"/>
-                </a:solidFill>
-                <a:latin typeface="DejaVu Sans"/>
-              </a:rPr>
-              <a:t>Wearable IMU + heart rate</a:t>
+              <a:rPr sz="1950" b="0" dirty="0">
+                <a:solidFill>
+                  <a:srgbClr val="12334A"/>
+                </a:solidFill>
+                <a:latin typeface="DejaVu Sans"/>
+              </a:rPr>
+              <a:t>Wearable </a:t>
+            </a:r>
+            <a:r>
+              <a:rPr lang="en-US" sz="1950" dirty="0">
+                <a:solidFill>
+                  <a:srgbClr val="12334A"/>
+                </a:solidFill>
+                <a:latin typeface="DejaVu Sans"/>
+              </a:rPr>
+              <a:t>movement</a:t>
+            </a:r>
+            <a:r>
+              <a:rPr sz="1950" b="0" dirty="0">
+                <a:solidFill>
+                  <a:srgbClr val="12334A"/>
+                </a:solidFill>
+                <a:latin typeface="DejaVu Sans"/>
+              </a:rPr>
+              <a:t> + heart rate</a:t>
             </a:r>
           </a:p>
           <a:p>
             <a:pPr algn="l"/>
             <a:r>
-              <a:rPr sz="1950" b="0">
+              <a:rPr sz="1950" b="0" dirty="0">
                 <a:solidFill>
                   <a:srgbClr val="12334A"/>
                 </a:solidFill>
@@ -4797,7 +4727,7 @@
           <a:p>
             <a:pPr algn="l"/>
             <a:r>
-              <a:rPr sz="1950" b="0">
+              <a:rPr sz="1950" b="0" dirty="0">
                 <a:solidFill>
                   <a:srgbClr val="12334A"/>
                 </a:solidFill>
@@ -4809,7 +4739,7 @@
           <a:p>
             <a:pPr algn="l"/>
             <a:r>
-              <a:rPr sz="1950" b="0">
+              <a:rPr sz="1950" b="0" dirty="0">
                 <a:solidFill>
                   <a:srgbClr val="12334A"/>
                 </a:solidFill>
@@ -5015,8 +4945,8 @@
         </p:nvSpPr>
         <p:spPr>
           <a:xfrm>
-            <a:off x="5476875" y="2667000"/>
-            <a:ext cx="6096000" cy="409575"/>
+            <a:off x="5476875" y="2727517"/>
+            <a:ext cx="6096000" cy="288541"/>
           </a:xfrm>
           <a:prstGeom prst="rect">
             <a:avLst/>
@@ -5037,7 +4967,25 @@
                 </a:solidFill>
                 <a:latin typeface="DejaVu Sans"/>
               </a:rPr>
-              <a:t>Holds the IMU and heart-rate sensor</a:t>
+              <a:t>Holds the </a:t>
+            </a:r>
+            <a:r>
+              <a:rPr lang="en-US" sz="1875" b="0" dirty="0">
+                <a:solidFill>
+                  <a:srgbClr val="12334A"/>
+                </a:solidFill>
+                <a:latin typeface="DejaVu Sans"/>
+              </a:rPr>
+              <a:t>movement</a:t>
+            </a:r>
+            <a:r>
+              <a:rPr sz="1875" b="0" dirty="0">
+                <a:solidFill>
+                  <a:srgbClr val="12334A"/>
+                </a:solidFill>
+                <a:latin typeface="DejaVu Sans"/>
+              </a:rPr>
+              <a:t> and heart-rate sensor</a:t>
             </a:r>
           </a:p>
         </p:txBody>
